--- a/out/DOC2PPT_2101.11796.pptx
+++ b/out/DOC2PPT_2101.11796.pptx
@@ -580,7 +580,7 @@
           <a:lstStyle/>
           <a:p>
             <a:r>
-              <a:t>This slide covers abstract. Open with: We propose a hierarchical sequence-to-sequence approach to tackle our task in an end-to-end manner. Then move to: Can machines learn to emulate this laborious process?. Target roughly 90 seconds here.</a:t>
+              <a:t>This slide covers abstract. Open with: We propose a hierarchical sequence-tosequence approach to tackle our task in an end-to-end manner. Then move to: Can machines learn to emulate this laborious process?. Target roughly 90 seconds here.</a:t>
             </a:r>
           </a:p>
         </p:txBody>
@@ -4358,7 +4358,7 @@
         <p:spPr>
           <a:xfrm>
             <a:off x="868680" y="1600200"/>
-            <a:ext cx="10424160" cy="4114800"/>
+            <a:ext cx="4754880" cy="3840480"/>
           </a:xfrm>
           <a:prstGeom prst="rect">
             <a:avLst/>
@@ -4395,7 +4395,7 @@
                 </a:solidFill>
                 <a:latin typeface="Helvetica Neue"/>
               </a:rPr>
-              <a:t>We propose a hierarchical sequence-to-sequence approach to tackle our task in an end-to-end manner</a:t>
+              <a:t>We propose a hierarchical sequence-tosequence approach to tackle our task in an end-to-end manner</a:t>
             </a:r>
           </a:p>
           <a:p>
@@ -4540,9 +4540,118 @@
           </a:p>
         </p:txBody>
       </p:sp>
-      <p:sp>
-        <p:nvSpPr>
-          <p:cNvPr id="5" name="TextBox 4"/>
+      <p:pic>
+        <p:nvPicPr>
+          <p:cNvPr id="5" name="Picture 4" descr="p01_01_figure.png"/>
+          <p:cNvPicPr>
+            <a:picLocks noChangeAspect="1"/>
+          </p:cNvPicPr>
+          <p:nvPr/>
+        </p:nvPicPr>
+        <p:blipFill>
+          <a:blip r:embed="rId2"/>
+          <a:stretch>
+            <a:fillRect/>
+          </a:stretch>
+        </p:blipFill>
+        <p:spPr>
+          <a:xfrm>
+            <a:off x="6868493" y="1481328"/>
+            <a:ext cx="3545173" cy="3931920"/>
+          </a:xfrm>
+          <a:prstGeom prst="rect">
+            <a:avLst/>
+          </a:prstGeom>
+        </p:spPr>
+      </p:pic>
+      <p:sp>
+        <p:nvSpPr>
+          <p:cNvPr id="6" name="Rectangle 5"/>
+          <p:cNvSpPr/>
+          <p:nvPr/>
+        </p:nvSpPr>
+        <p:spPr>
+          <a:xfrm>
+            <a:off x="5897880" y="5504688"/>
+            <a:ext cx="5486400" cy="841248"/>
+          </a:xfrm>
+          <a:prstGeom prst="rect">
+            <a:avLst/>
+          </a:prstGeom>
+          <a:solidFill>
+            <a:srgbClr val="F4F6F8"/>
+          </a:solidFill>
+          <a:ln>
+            <a:noFill/>
+          </a:ln>
+        </p:spPr>
+        <p:style>
+          <a:lnRef idx="1">
+            <a:schemeClr val="accent1"/>
+          </a:lnRef>
+          <a:fillRef idx="3">
+            <a:schemeClr val="accent1"/>
+          </a:fillRef>
+          <a:effectRef idx="2">
+            <a:schemeClr val="accent1"/>
+          </a:effectRef>
+          <a:fontRef idx="minor">
+            <a:schemeClr val="lt1"/>
+          </a:fontRef>
+        </p:style>
+        <p:txBody>
+          <a:bodyPr rtlCol="0" anchor="ctr"/>
+          <a:lstStyle/>
+          <a:p>
+            <a:pPr algn="ctr"/>
+          </a:p>
+        </p:txBody>
+      </p:sp>
+      <p:sp>
+        <p:nvSpPr>
+          <p:cNvPr id="7" name="TextBox 6"/>
+          <p:cNvSpPr txBox="1"/>
+          <p:nvPr/>
+        </p:nvSpPr>
+        <p:spPr>
+          <a:xfrm>
+            <a:off x="6053328" y="5596128"/>
+            <a:ext cx="5212080" cy="658368"/>
+          </a:xfrm>
+          <a:prstGeom prst="rect">
+            <a:avLst/>
+          </a:prstGeom>
+          <a:noFill/>
+        </p:spPr>
+        <p:txBody>
+          <a:bodyPr wrap="square" anchor="t" lIns="0" rIns="0" tIns="0" bIns="0">
+            <a:spAutoFit/>
+          </a:bodyPr>
+          <a:lstStyle/>
+          <a:p>
+            <a:pPr algn="l">
+              <a:lnSpc>
+                <a:spcPct val="115000"/>
+              </a:lnSpc>
+              <a:spcBef>
+                <a:spcPts val="0"/>
+              </a:spcBef>
+            </a:pPr>
+            <a:r>
+              <a:rPr sz="950" b="0">
+                <a:solidFill>
+                  <a:srgbClr val="5A6B7C"/>
+                </a:solidFill>
+                <a:latin typeface="Helvetica Neue"/>
+              </a:rPr>
+              <a:t>Figure 1: We introduce DOC2PPT, a novel task of gener- ating a slide deck from a document. This requires solving several challenges in the vision-and-language domain, e.g., visual-semantic embedding and ...</a:t>
+            </a:r>
+          </a:p>
+        </p:txBody>
+      </p:sp>
+      <p:sp>
+        <p:nvSpPr>
+          <p:cNvPr id="8" name="TextBox 7"/>
           <p:cNvSpPr txBox="1"/>
           <p:nvPr/>
         </p:nvSpPr>
@@ -4871,7 +4980,7 @@
                 </a:solidFill>
                 <a:latin typeface="Helvetica Neue"/>
               </a:rPr>
-              <a:t>Furthermore, none of the above addresses the challenge of ﬁnd-ing an optimal visual layout ...</a:t>
+              <a:t>Furthermore, none of the above addresses the challenge of ﬁnding an optimal visual layout ...</a:t>
             </a:r>
           </a:p>
         </p:txBody>
@@ -5030,7 +5139,7 @@
         <p:spPr>
           <a:xfrm>
             <a:off x="868680" y="1600200"/>
-            <a:ext cx="10424160" cy="4114800"/>
+            <a:ext cx="4754880" cy="3840480"/>
           </a:xfrm>
           <a:prstGeom prst="rect">
             <a:avLst/>
@@ -5212,16 +5321,40 @@
           </a:p>
         </p:txBody>
       </p:sp>
-      <p:sp>
-        <p:nvSpPr>
-          <p:cNvPr id="5" name="Rectangle 4"/>
+      <p:pic>
+        <p:nvPicPr>
+          <p:cNvPr id="5" name="Picture 4" descr="p03_01_figure.png"/>
+          <p:cNvPicPr>
+            <a:picLocks noChangeAspect="1"/>
+          </p:cNvPicPr>
+          <p:nvPr/>
+        </p:nvPicPr>
+        <p:blipFill>
+          <a:blip r:embed="rId2"/>
+          <a:stretch>
+            <a:fillRect/>
+          </a:stretch>
+        </p:blipFill>
+        <p:spPr>
+          <a:xfrm>
+            <a:off x="6659058" y="1481328"/>
+            <a:ext cx="3964043" cy="3931919"/>
+          </a:xfrm>
+          <a:prstGeom prst="rect">
+            <a:avLst/>
+          </a:prstGeom>
+        </p:spPr>
+      </p:pic>
+      <p:sp>
+        <p:nvSpPr>
+          <p:cNvPr id="6" name="Rectangle 5"/>
           <p:cNvSpPr/>
           <p:nvPr/>
         </p:nvSpPr>
         <p:spPr>
           <a:xfrm>
-            <a:off x="868680" y="5623560"/>
-            <a:ext cx="10424160" cy="685800"/>
+            <a:off x="5897880" y="5504688"/>
+            <a:ext cx="5486400" cy="841248"/>
           </a:xfrm>
           <a:prstGeom prst="rect">
             <a:avLst/>
@@ -5257,14 +5390,14 @@
       </p:sp>
       <p:sp>
         <p:nvSpPr>
-          <p:cNvPr id="6" name="TextBox 5"/>
+          <p:cNvPr id="7" name="TextBox 6"/>
           <p:cNvSpPr txBox="1"/>
           <p:nvPr/>
         </p:nvSpPr>
         <p:spPr>
           <a:xfrm>
-            <a:off x="1051560" y="5742432"/>
-            <a:ext cx="10058400" cy="457200"/>
+            <a:off x="6053328" y="5596128"/>
+            <a:ext cx="5212080" cy="658368"/>
           </a:xfrm>
           <a:prstGeom prst="rect">
             <a:avLst/>
@@ -5279,27 +5412,27 @@
           <a:p>
             <a:pPr algn="l">
               <a:lnSpc>
-                <a:spcPct val="120000"/>
+                <a:spcPct val="115000"/>
               </a:lnSpc>
               <a:spcBef>
                 <a:spcPts val="0"/>
               </a:spcBef>
             </a:pPr>
             <a:r>
-              <a:rPr sz="1100" b="0">
+              <a:rPr sz="950" b="0">
                 <a:solidFill>
                   <a:srgbClr val="5A6B7C"/>
                 </a:solidFill>
                 <a:latin typeface="Helvetica Neue"/>
               </a:rPr>
-              <a:t>Figure 1: We introduce DOC2PPT, a novel task of gener-</a:t>
-            </a:r>
-          </a:p>
-        </p:txBody>
-      </p:sp>
-      <p:sp>
-        <p:nvSpPr>
-          <p:cNvPr id="7" name="TextBox 6"/>
+              <a:t>Figure 2: An overview of our architecture. It consists of modules (DR, PT, OP, PAR) that read a document and gen- erate a slide deck in a hierarchically structured manner.</a:t>
+            </a:r>
+          </a:p>
+        </p:txBody>
+      </p:sp>
+      <p:sp>
+        <p:nvSpPr>
+          <p:cNvPr id="8" name="TextBox 7"/>
           <p:cNvSpPr txBox="1"/>
           <p:nvPr/>
         </p:nvSpPr>
@@ -5908,7 +6041,7 @@
                 </a:solidFill>
                 <a:latin typeface="Helvetica Neue"/>
               </a:rPr>
-              <a:t>We also perform hu-man evaluation to assess the generation quality</a:t>
+              <a:t>We also perform human evaluation to assess the generation quality</a:t>
             </a:r>
           </a:p>
         </p:txBody>
@@ -6188,7 +6321,7 @@
                 </a:solidFill>
                 <a:latin typeface="Helvetica Neue"/>
               </a:rPr>
-              <a:t>Therefore, we propose the slide-level ROUGE: ROUGE-SL = ROUGE-L × e |Q−˜ Q| Q ...</a:t>
+              <a:t>Therefore, we propose the slide-level ROUGE: ROUGE-SL = ROUGE-L × e |Q− ˜ Q| ...</a:t>
             </a:r>
           </a:p>
           <a:p>

--- a/out/DOC2PPT_2101.11796.pptx
+++ b/out/DOC2PPT_2101.11796.pptx
@@ -14,6 +14,9 @@
     <p:sldId id="262" r:id="rId14"/>
     <p:sldId id="263" r:id="rId15"/>
     <p:sldId id="264" r:id="rId16"/>
+    <p:sldId id="265" r:id="rId17"/>
+    <p:sldId id="266" r:id="rId18"/>
+    <p:sldId id="267" r:id="rId19"/>
   </p:sldIdLst>
   <p:sldSz cx="12191695" cy="6858000" type="screen4x3"/>
   <p:notesSz cx="6858000" cy="9144000"/>
@@ -535,6 +538,216 @@
 </p:notes>
 </file>
 
+<file path=ppt/notesSlides/notesSlide10.xml><?xml version="1.0" encoding="utf-8"?>
+<p:notes xmlns:a="http://schemas.openxmlformats.org/drawingml/2006/main" xmlns:p="http://schemas.openxmlformats.org/presentationml/2006/main" xmlns:r="http://schemas.openxmlformats.org/officeDocument/2006/relationships">
+  <p:cSld>
+    <p:spTree>
+      <p:nvGrpSpPr>
+        <p:cNvPr id="1" name=""/>
+        <p:cNvGrpSpPr/>
+        <p:nvPr/>
+      </p:nvGrpSpPr>
+      <p:grpSpPr>
+        <a:xfrm>
+          <a:off x="0" y="0"/>
+          <a:ext cx="0" cy="0"/>
+          <a:chOff x="0" y="0"/>
+          <a:chExt cx="0" cy="0"/>
+        </a:xfrm>
+      </p:grpSpPr>
+      <p:sp>
+        <p:nvSpPr>
+          <p:cNvPr id="2" name="Slide Image Placeholder 1"/>
+          <p:cNvSpPr>
+            <a:spLocks noGrp="1"/>
+          </p:cNvSpPr>
+          <p:nvPr>
+            <p:ph type="sldImg" idx="2"/>
+          </p:nvPr>
+        </p:nvSpPr>
+        <p:spPr/>
+      </p:sp>
+      <p:sp>
+        <p:nvSpPr>
+          <p:cNvPr id="3" name="Notes Placeholder 2"/>
+          <p:cNvSpPr>
+            <a:spLocks noGrp="1"/>
+          </p:cNvSpPr>
+          <p:nvPr>
+            <p:ph type="body" idx="3" sz="quarter"/>
+          </p:nvPr>
+        </p:nvSpPr>
+        <p:spPr/>
+        <p:txBody>
+          <a:bodyPr/>
+          <a:lstStyle/>
+          <a:p>
+            <a:r>
+              <a:t>This slide covers evaluation metrics. Open with: Therefore, we propose the slide-level ROUGE: ROUGE-SL = ROUGE-L × e |Q− ˜ Q| .... Then move to: Intuitively, the number of slides in a deck is a good proxy for the .... Target roughly 65 seconds here.</a:t>
+            </a:r>
+          </a:p>
+        </p:txBody>
+      </p:sp>
+      <p:sp>
+        <p:nvSpPr>
+          <p:cNvPr id="4" name="Slide Number Placeholder 3"/>
+          <p:cNvSpPr>
+            <a:spLocks noGrp="1"/>
+          </p:cNvSpPr>
+          <p:nvPr>
+            <p:ph type="sldNum" idx="5" sz="quarter"/>
+          </p:nvPr>
+        </p:nvSpPr>
+        <p:spPr/>
+      </p:sp>
+    </p:spTree>
+  </p:cSld>
+  <p:clrMapOvr>
+    <a:masterClrMapping/>
+  </p:clrMapOvr>
+</p:notes>
+</file>
+
+<file path=ppt/notesSlides/notesSlide11.xml><?xml version="1.0" encoding="utf-8"?>
+<p:notes xmlns:a="http://schemas.openxmlformats.org/drawingml/2006/main" xmlns:p="http://schemas.openxmlformats.org/presentationml/2006/main" xmlns:r="http://schemas.openxmlformats.org/officeDocument/2006/relationships">
+  <p:cSld>
+    <p:spTree>
+      <p:nvGrpSpPr>
+        <p:cNvPr id="1" name=""/>
+        <p:cNvGrpSpPr/>
+        <p:nvPr/>
+      </p:nvGrpSpPr>
+      <p:grpSpPr>
+        <a:xfrm>
+          <a:off x="0" y="0"/>
+          <a:ext cx="0" cy="0"/>
+          <a:chOff x="0" y="0"/>
+          <a:chExt cx="0" cy="0"/>
+        </a:xfrm>
+      </p:grpSpPr>
+      <p:sp>
+        <p:nvSpPr>
+          <p:cNvPr id="2" name="Slide Image Placeholder 1"/>
+          <p:cNvSpPr>
+            <a:spLocks noGrp="1"/>
+          </p:cNvSpPr>
+          <p:nvPr>
+            <p:ph type="sldImg" idx="2"/>
+          </p:nvPr>
+        </p:nvSpPr>
+        <p:spPr/>
+      </p:sp>
+      <p:sp>
+        <p:nvSpPr>
+          <p:cNvPr id="3" name="Notes Placeholder 2"/>
+          <p:cNvSpPr>
+            <a:spLocks noGrp="1"/>
+          </p:cNvSpPr>
+          <p:nvPr>
+            <p:ph type="body" idx="3" sz="quarter"/>
+          </p:nvPr>
+        </p:nvSpPr>
+        <p:spPr/>
+        <p:txBody>
+          <a:bodyPr/>
+          <a:lstStyle/>
+          <a:p>
+            <a:r>
+              <a:t>This slide covers implementation detail. Open with: Each layer of the PT is based on a 256-unit GRU. Then move to: For the DR, we use a Bi-GRU with 1,024 hidden units and set the .... Target roughly 65 seconds here.</a:t>
+            </a:r>
+          </a:p>
+        </p:txBody>
+      </p:sp>
+      <p:sp>
+        <p:nvSpPr>
+          <p:cNvPr id="4" name="Slide Number Placeholder 3"/>
+          <p:cNvSpPr>
+            <a:spLocks noGrp="1"/>
+          </p:cNvSpPr>
+          <p:nvPr>
+            <p:ph type="sldNum" idx="5" sz="quarter"/>
+          </p:nvPr>
+        </p:nvSpPr>
+        <p:spPr/>
+      </p:sp>
+    </p:spTree>
+  </p:cSld>
+  <p:clrMapOvr>
+    <a:masterClrMapping/>
+  </p:clrMapOvr>
+</p:notes>
+</file>
+
+<file path=ppt/notesSlides/notesSlide12.xml><?xml version="1.0" encoding="utf-8"?>
+<p:notes xmlns:a="http://schemas.openxmlformats.org/drawingml/2006/main" xmlns:p="http://schemas.openxmlformats.org/presentationml/2006/main" xmlns:r="http://schemas.openxmlformats.org/officeDocument/2006/relationships">
+  <p:cSld>
+    <p:spTree>
+      <p:nvGrpSpPr>
+        <p:cNvPr id="1" name=""/>
+        <p:cNvGrpSpPr/>
+        <p:nvPr/>
+      </p:nvGrpSpPr>
+      <p:grpSpPr>
+        <a:xfrm>
+          <a:off x="0" y="0"/>
+          <a:ext cx="0" cy="0"/>
+          <a:chOff x="0" y="0"/>
+          <a:chExt cx="0" cy="0"/>
+        </a:xfrm>
+      </p:grpSpPr>
+      <p:sp>
+        <p:nvSpPr>
+          <p:cNvPr id="2" name="Slide Image Placeholder 1"/>
+          <p:cNvSpPr>
+            <a:spLocks noGrp="1"/>
+          </p:cNvSpPr>
+          <p:nvPr>
+            <p:ph type="sldImg" idx="2"/>
+          </p:nvPr>
+        </p:nvSpPr>
+        <p:spPr/>
+      </p:sp>
+      <p:sp>
+        <p:nvSpPr>
+          <p:cNvPr id="3" name="Notes Placeholder 2"/>
+          <p:cNvSpPr>
+            <a:spLocks noGrp="1"/>
+          </p:cNvSpPr>
+          <p:nvPr>
+            <p:ph type="body" idx="3" sz="quarter"/>
+          </p:nvPr>
+        </p:nvSpPr>
+        <p:spPr/>
+        <p:txBody>
+          <a:bodyPr/>
+          <a:lstStyle/>
+          <a:p>
+            <a:r>
+              <a:t>This slide covers conclusion. Open with: We release a large set of 5,873 paired documents and slide decks, and provide .... Then move to: We present a novel task and approach for generating slides from documents. Target roughly 65 seconds here.</a:t>
+            </a:r>
+          </a:p>
+        </p:txBody>
+      </p:sp>
+      <p:sp>
+        <p:nvSpPr>
+          <p:cNvPr id="4" name="Slide Number Placeholder 3"/>
+          <p:cNvSpPr>
+            <a:spLocks noGrp="1"/>
+          </p:cNvSpPr>
+          <p:nvPr>
+            <p:ph type="sldNum" idx="5" sz="quarter"/>
+          </p:nvPr>
+        </p:nvSpPr>
+        <p:spPr/>
+      </p:sp>
+    </p:spTree>
+  </p:cSld>
+  <p:clrMapOvr>
+    <a:masterClrMapping/>
+  </p:clrMapOvr>
+</p:notes>
+</file>
+
 <file path=ppt/notesSlides/notesSlide2.xml><?xml version="1.0" encoding="utf-8"?>
 <p:notes xmlns:a="http://schemas.openxmlformats.org/drawingml/2006/main" xmlns:p="http://schemas.openxmlformats.org/presentationml/2006/main" xmlns:r="http://schemas.openxmlformats.org/officeDocument/2006/relationships">
   <p:cSld>
@@ -580,7 +793,7 @@
           <a:lstStyle/>
           <a:p>
             <a:r>
-              <a:t>This slide covers abstract. Open with: We propose a hierarchical sequence-tosequence approach to tackle our task in an end-to-end manner. Then move to: Can machines learn to emulate this laborious process?. Target roughly 90 seconds here.</a:t>
+              <a:t>This slide covers abstract. Open with: We propose a hierarchical sequence-tosequence approach to tackle our task in an end-to-end manner. Then move to: Can machines learn to emulate this laborious process?. Target roughly 65 seconds here.</a:t>
             </a:r>
           </a:p>
         </p:txBody>
@@ -650,7 +863,7 @@
           <a:lstStyle/>
           <a:p>
             <a:r>
-              <a:t>This slide covers introduction. Open with: We hope that our DOC2PPT will advance the state-of-the-art in the vision-and-language domain. Then move to: In this paper, we introduce DOC2PPT, a novel task of creating presentation slides from .... Target roughly 90 seconds here.</a:t>
+              <a:t>This slide covers introduction. Open with: We hope that our DOC2PPT will advance the state-of-the-art in the vision-and-language domain. Then move to: In this paper, we introduce DOC2PPT, a novel task of creating presentation slides from .... Target roughly 65 seconds here.</a:t>
             </a:r>
           </a:p>
         </p:txBody>
@@ -720,7 +933,7 @@
           <a:lstStyle/>
           <a:p>
             <a:r>
-              <a:t>This slide covers related work. Open with: We propose a large dataset of 5,873 pairs of high-quality scientiﬁc documents and slide .... Then move to: Learning text-image similarity has been studied in the visual-semantic embedding (VSE) literature (Karpathy and .... Target roughly 90 seconds here.</a:t>
+              <a:t>This slide covers related work. Open with: We propose a large dataset of 5,873 pairs of high-quality scientific documents and slide .... Then move to: Learning text-image similarity has been studied in the visual-semantic embedding (VSE) literature (Karpathy and .... Target roughly 65 seconds here.</a:t>
             </a:r>
           </a:p>
         </p:txBody>
@@ -790,7 +1003,7 @@
           <a:lstStyle/>
           <a:p>
             <a:r>
-              <a:t>This slide covers approach. Open with: Table 1 reports the descriptive statistics of our dataset. Then move to: We tune the two hyper-parameters θR and θA via cross-validation (we set θR = .... Target roughly 90 seconds here.</a:t>
+              <a:t>This slide covers approach. Open with: The goal of DOC2PPT is to generate a slide deck from a multimodal document .... Then move to: This is a natural choice to encode our prior knowledge about the hierarchical structure. Target roughly 65 seconds here.</a:t>
             </a:r>
           </a:p>
         </p:txBody>
@@ -860,7 +1073,7 @@
           <a:lstStyle/>
           <a:p>
             <a:r>
-              <a:t>This slide covers experiments. Open with: DOC2PPT is a new task with no established evaluation metrics and baselines. Then move to: We carefully ablate various components of our approach and evaluate them on our proposed .... Target roughly 90 seconds here.</a:t>
+              <a:t>This slide covers training. Open with: While there exist several solutions to bounding box regression (He et al. Then move to: This term is slide-insensitive, i.e., the correct/incorrect inclusion is not affected by which specific .... Target roughly 65 seconds here.</a:t>
             </a:r>
           </a:p>
         </p:txBody>
@@ -930,7 +1143,7 @@
           <a:lstStyle/>
           <a:p>
             <a:r>
-              <a:t>This slide covers evaluation metrics. Open with: Each layer of the PT is based on a 256-unit GRU. Then move to: Implementation Detail For the DR, we use a Bi-GRU with 1,024 hidden units and .... Target roughly 90 seconds here.</a:t>
+              <a:t>This slide covers inference. Open with: We tune the two hyper-parameters θR and θA via cross-validation (we set θR = .... Then move to: The inference procedures during training and test times largely follow the same process, with .... Target roughly 65 seconds here.</a:t>
             </a:r>
           </a:p>
         </p:txBody>
@@ -1000,7 +1213,7 @@
           <a:lstStyle/>
           <a:p>
             <a:r>
-              <a:t>This slide covers results and discussions. Open with: Table 2 (a) and (b) compare the two models on the four metrics. Then move to: Table 2 (f) shows this post-processing further improves the two image-related metrics, LC-FS and .... Target roughly 90 seconds here.</a:t>
+              <a:t>This slide covers dataset. Open with: For simplicity, we discard F out if its highest visual embedding similarity is lower .... Then move to: Lastly, we match figures from slides to those in the corresponding document. Target roughly 65 seconds here.</a:t>
             </a:r>
           </a:p>
         </p:txBody>
@@ -1070,7 +1283,7 @@
           <a:lstStyle/>
           <a:p>
             <a:r>
-              <a:t>This slide covers conclusion. Open with: Our slide stemming step is 93% accurate based on the human annotated validation set. Then move to: Sentence Matching Table 4 shows examples of matching sentences between the paper and the .... Target roughly 90 seconds here.</a:t>
+              <a:t>This slide covers experiments. Open with: DOC2PPT is a new task with no established evaluation metrics and baselines. Then move to: We carefully ablate various components of our approach and evaluate them on our proposed .... Target roughly 65 seconds here.</a:t>
             </a:r>
           </a:p>
         </p:txBody>
@@ -4254,7 +4467,7 @@
 </p:sld>
 </file>
 
-<file path=ppt/slides/slide2.xml><?xml version="1.0" encoding="utf-8"?>
+<file path=ppt/slides/slide10.xml><?xml version="1.0" encoding="utf-8"?>
 <p:sld xmlns:a="http://schemas.openxmlformats.org/drawingml/2006/main" xmlns:p="http://schemas.openxmlformats.org/presentationml/2006/main" xmlns:r="http://schemas.openxmlformats.org/officeDocument/2006/relationships">
   <p:cSld>
     <p:spTree>
@@ -4301,7 +4514,7 @@
                 </a:solidFill>
                 <a:latin typeface="Helvetica Neue"/>
               </a:rPr>
-              <a:t>Abstract</a:t>
+              <a:t>Evaluation Metrics</a:t>
             </a:r>
           </a:p>
         </p:txBody>
@@ -4358,6 +4571,930 @@
         <p:spPr>
           <a:xfrm>
             <a:off x="868680" y="1600200"/>
+            <a:ext cx="10424160" cy="4114800"/>
+          </a:xfrm>
+          <a:prstGeom prst="rect">
+            <a:avLst/>
+          </a:prstGeom>
+          <a:noFill/>
+        </p:spPr>
+        <p:txBody>
+          <a:bodyPr wrap="square" anchor="t" lIns="0" rIns="0" tIns="0" bIns="0">
+            <a:spAutoFit/>
+          </a:bodyPr>
+          <a:lstStyle/>
+          <a:p>
+            <a:pPr>
+              <a:lnSpc>
+                <a:spcPct val="125000"/>
+              </a:lnSpc>
+              <a:spcBef>
+                <a:spcPts val="0"/>
+              </a:spcBef>
+            </a:pPr>
+            <a:r>
+              <a:rPr sz="1700" b="1">
+                <a:solidFill>
+                  <a:srgbClr val="C08A2E"/>
+                </a:solidFill>
+                <a:latin typeface="Helvetica Neue"/>
+              </a:rPr>
+              <a:t>-  </a:t>
+            </a:r>
+            <a:r>
+              <a:rPr sz="1700">
+                <a:solidFill>
+                  <a:srgbClr val="10233A"/>
+                </a:solidFill>
+                <a:latin typeface="Helvetica Neue"/>
+              </a:rPr>
+              <a:t>Therefore, we propose the slide-level ROUGE: ROUGE-SL = ROUGE-L × e |Q− ˜ Q| ...</a:t>
+            </a:r>
+          </a:p>
+          <a:p>
+            <a:pPr>
+              <a:lnSpc>
+                <a:spcPct val="125000"/>
+              </a:lnSpc>
+              <a:spcBef>
+                <a:spcPts val="1200"/>
+              </a:spcBef>
+            </a:pPr>
+            <a:r>
+              <a:rPr sz="1700" b="1">
+                <a:solidFill>
+                  <a:srgbClr val="C08A2E"/>
+                </a:solidFill>
+                <a:latin typeface="Helvetica Neue"/>
+              </a:rPr>
+              <a:t>-  </a:t>
+            </a:r>
+            <a:r>
+              <a:rPr sz="1700">
+                <a:solidFill>
+                  <a:srgbClr val="10233A"/>
+                </a:solidFill>
+                <a:latin typeface="Helvetica Neue"/>
+              </a:rPr>
+              <a:t>Intuitively, the number of slides in a deck is a good proxy for the ...</a:t>
+            </a:r>
+          </a:p>
+          <a:p>
+            <a:pPr>
+              <a:lnSpc>
+                <a:spcPct val="125000"/>
+              </a:lnSpc>
+              <a:spcBef>
+                <a:spcPts val="1200"/>
+              </a:spcBef>
+            </a:pPr>
+            <a:r>
+              <a:rPr sz="1700" b="1">
+                <a:solidFill>
+                  <a:srgbClr val="C08A2E"/>
+                </a:solidFill>
+                <a:latin typeface="Helvetica Neue"/>
+              </a:rPr>
+              <a:t>-  </a:t>
+            </a:r>
+            <a:r>
+              <a:rPr sz="1700">
+                <a:solidFill>
+                  <a:srgbClr val="10233A"/>
+                </a:solidFill>
+                <a:latin typeface="Helvetica Neue"/>
+              </a:rPr>
+              <a:t>Ablation Settings ROUGE-SL LC-FS TFR mIoU Hrch-PT PAR TIM Post Proc</a:t>
+            </a:r>
+          </a:p>
+          <a:p>
+            <a:pPr>
+              <a:lnSpc>
+                <a:spcPct val="125000"/>
+              </a:lnSpc>
+              <a:spcBef>
+                <a:spcPts val="1200"/>
+              </a:spcBef>
+            </a:pPr>
+            <a:r>
+              <a:rPr sz="1700" b="1">
+                <a:solidFill>
+                  <a:srgbClr val="C08A2E"/>
+                </a:solidFill>
+                <a:latin typeface="Helvetica Neue"/>
+              </a:rPr>
+              <a:t>-  </a:t>
+            </a:r>
+            <a:r>
+              <a:rPr sz="1700">
+                <a:solidFill>
+                  <a:srgbClr val="10233A"/>
+                </a:solidFill>
+                <a:latin typeface="Helvetica Neue"/>
+              </a:rPr>
+              <a:t>A good design layout makes it easy to consume information presented in slides</a:t>
+            </a:r>
+          </a:p>
+          <a:p>
+            <a:pPr>
+              <a:lnSpc>
+                <a:spcPct val="125000"/>
+              </a:lnSpc>
+              <a:spcBef>
+                <a:spcPts val="1200"/>
+              </a:spcBef>
+            </a:pPr>
+            <a:r>
+              <a:rPr sz="1700" b="1">
+                <a:solidFill>
+                  <a:srgbClr val="C08A2E"/>
+                </a:solidFill>
+                <a:latin typeface="Helvetica Neue"/>
+              </a:rPr>
+              <a:t>-  </a:t>
+            </a:r>
+            <a:r>
+              <a:rPr sz="1700">
+                <a:solidFill>
+                  <a:srgbClr val="10233A"/>
+                </a:solidFill>
+                <a:latin typeface="Helvetica Neue"/>
+              </a:rPr>
+              <a:t>To measure the quality of text in the generated slides, we adapt the widelyused ...</a:t>
+            </a:r>
+          </a:p>
+          <a:p>
+            <a:pPr>
+              <a:lnSpc>
+                <a:spcPct val="125000"/>
+              </a:lnSpc>
+              <a:spcBef>
+                <a:spcPts val="1200"/>
+              </a:spcBef>
+            </a:pPr>
+            <a:r>
+              <a:rPr sz="1700" b="1">
+                <a:solidFill>
+                  <a:srgbClr val="C08A2E"/>
+                </a:solidFill>
+                <a:latin typeface="Helvetica Neue"/>
+              </a:rPr>
+              <a:t>-  </a:t>
+            </a:r>
+            <a:r>
+              <a:rPr sz="1700">
+                <a:solidFill>
+                  <a:srgbClr val="10233A"/>
+                </a:solidFill>
+                <a:latin typeface="Helvetica Neue"/>
+              </a:rPr>
+              <a:t>To evaluate the layout quality, we adapt the mean intersection over union (mIoU) (Everingham ...</a:t>
+            </a:r>
+          </a:p>
+        </p:txBody>
+      </p:sp>
+      <p:sp>
+        <p:nvSpPr>
+          <p:cNvPr id="5" name="TextBox 4"/>
+          <p:cNvSpPr txBox="1"/>
+          <p:nvPr/>
+        </p:nvSpPr>
+        <p:spPr>
+          <a:xfrm>
+            <a:off x="10881360" y="6446520"/>
+            <a:ext cx="548640" cy="274320"/>
+          </a:xfrm>
+          <a:prstGeom prst="rect">
+            <a:avLst/>
+          </a:prstGeom>
+          <a:noFill/>
+        </p:spPr>
+        <p:txBody>
+          <a:bodyPr wrap="square" anchor="t" lIns="0" rIns="0" tIns="0" bIns="0">
+            <a:spAutoFit/>
+          </a:bodyPr>
+          <a:lstStyle/>
+          <a:p>
+            <a:pPr algn="r">
+              <a:lnSpc>
+                <a:spcPct val="120000"/>
+              </a:lnSpc>
+              <a:spcBef>
+                <a:spcPts val="0"/>
+              </a:spcBef>
+            </a:pPr>
+            <a:r>
+              <a:rPr sz="900" b="0">
+                <a:solidFill>
+                  <a:srgbClr val="5A6B7C"/>
+                </a:solidFill>
+                <a:latin typeface="Helvetica Neue"/>
+              </a:rPr>
+              <a:t>10</a:t>
+            </a:r>
+          </a:p>
+        </p:txBody>
+      </p:sp>
+    </p:spTree>
+  </p:cSld>
+  <p:clrMapOvr>
+    <a:masterClrMapping/>
+  </p:clrMapOvr>
+</p:sld>
+</file>
+
+<file path=ppt/slides/slide11.xml><?xml version="1.0" encoding="utf-8"?>
+<p:sld xmlns:a="http://schemas.openxmlformats.org/drawingml/2006/main" xmlns:p="http://schemas.openxmlformats.org/presentationml/2006/main" xmlns:r="http://schemas.openxmlformats.org/officeDocument/2006/relationships">
+  <p:cSld>
+    <p:spTree>
+      <p:nvGrpSpPr>
+        <p:cNvPr id="1" name=""/>
+        <p:cNvGrpSpPr/>
+        <p:nvPr/>
+      </p:nvGrpSpPr>
+      <p:grpSpPr/>
+      <p:sp>
+        <p:nvSpPr>
+          <p:cNvPr id="2" name="TextBox 1"/>
+          <p:cNvSpPr txBox="1"/>
+          <p:nvPr/>
+        </p:nvSpPr>
+        <p:spPr>
+          <a:xfrm>
+            <a:off x="822960" y="502920"/>
+            <a:ext cx="10515600" cy="822960"/>
+          </a:xfrm>
+          <a:prstGeom prst="rect">
+            <a:avLst/>
+          </a:prstGeom>
+          <a:noFill/>
+        </p:spPr>
+        <p:txBody>
+          <a:bodyPr wrap="square" anchor="t" lIns="0" rIns="0" tIns="0" bIns="0">
+            <a:spAutoFit/>
+          </a:bodyPr>
+          <a:lstStyle/>
+          <a:p>
+            <a:pPr algn="l">
+              <a:lnSpc>
+                <a:spcPct val="110000"/>
+              </a:lnSpc>
+              <a:spcBef>
+                <a:spcPts val="0"/>
+              </a:spcBef>
+            </a:pPr>
+            <a:r>
+              <a:rPr sz="2800" b="1">
+                <a:solidFill>
+                  <a:srgbClr val="10233A"/>
+                </a:solidFill>
+                <a:latin typeface="Helvetica Neue"/>
+              </a:rPr>
+              <a:t>Implementation Detail</a:t>
+            </a:r>
+          </a:p>
+        </p:txBody>
+      </p:sp>
+      <p:sp>
+        <p:nvSpPr>
+          <p:cNvPr id="3" name="Rectangle 2"/>
+          <p:cNvSpPr/>
+          <p:nvPr/>
+        </p:nvSpPr>
+        <p:spPr>
+          <a:xfrm>
+            <a:off x="822960" y="1298448"/>
+            <a:ext cx="10515600" cy="18288"/>
+          </a:xfrm>
+          <a:prstGeom prst="rect">
+            <a:avLst/>
+          </a:prstGeom>
+          <a:solidFill>
+            <a:srgbClr val="DDE2E8"/>
+          </a:solidFill>
+          <a:ln>
+            <a:noFill/>
+          </a:ln>
+        </p:spPr>
+        <p:style>
+          <a:lnRef idx="1">
+            <a:schemeClr val="accent1"/>
+          </a:lnRef>
+          <a:fillRef idx="3">
+            <a:schemeClr val="accent1"/>
+          </a:fillRef>
+          <a:effectRef idx="2">
+            <a:schemeClr val="accent1"/>
+          </a:effectRef>
+          <a:fontRef idx="minor">
+            <a:schemeClr val="lt1"/>
+          </a:fontRef>
+        </p:style>
+        <p:txBody>
+          <a:bodyPr rtlCol="0" anchor="ctr"/>
+          <a:lstStyle/>
+          <a:p>
+            <a:pPr algn="ctr"/>
+          </a:p>
+        </p:txBody>
+      </p:sp>
+      <p:sp>
+        <p:nvSpPr>
+          <p:cNvPr id="4" name="TextBox 3"/>
+          <p:cNvSpPr txBox="1"/>
+          <p:nvPr/>
+        </p:nvSpPr>
+        <p:spPr>
+          <a:xfrm>
+            <a:off x="868680" y="1600200"/>
+            <a:ext cx="10424160" cy="4114800"/>
+          </a:xfrm>
+          <a:prstGeom prst="rect">
+            <a:avLst/>
+          </a:prstGeom>
+          <a:noFill/>
+        </p:spPr>
+        <p:txBody>
+          <a:bodyPr wrap="square" anchor="t" lIns="0" rIns="0" tIns="0" bIns="0">
+            <a:spAutoFit/>
+          </a:bodyPr>
+          <a:lstStyle/>
+          <a:p>
+            <a:pPr>
+              <a:lnSpc>
+                <a:spcPct val="125000"/>
+              </a:lnSpc>
+              <a:spcBef>
+                <a:spcPts val="0"/>
+              </a:spcBef>
+            </a:pPr>
+            <a:r>
+              <a:rPr sz="2000" b="1">
+                <a:solidFill>
+                  <a:srgbClr val="C08A2E"/>
+                </a:solidFill>
+                <a:latin typeface="Helvetica Neue"/>
+              </a:rPr>
+              <a:t>-  </a:t>
+            </a:r>
+            <a:r>
+              <a:rPr sz="2000">
+                <a:solidFill>
+                  <a:srgbClr val="10233A"/>
+                </a:solidFill>
+                <a:latin typeface="Helvetica Neue"/>
+              </a:rPr>
+              <a:t>Each layer of the PT is based on a 256-unit GRU</a:t>
+            </a:r>
+          </a:p>
+          <a:p>
+            <a:pPr>
+              <a:lnSpc>
+                <a:spcPct val="125000"/>
+              </a:lnSpc>
+              <a:spcBef>
+                <a:spcPts val="1200"/>
+              </a:spcBef>
+            </a:pPr>
+            <a:r>
+              <a:rPr sz="2000" b="1">
+                <a:solidFill>
+                  <a:srgbClr val="C08A2E"/>
+                </a:solidFill>
+                <a:latin typeface="Helvetica Neue"/>
+              </a:rPr>
+              <a:t>-  </a:t>
+            </a:r>
+            <a:r>
+              <a:rPr sz="2000">
+                <a:solidFill>
+                  <a:srgbClr val="10233A"/>
+                </a:solidFill>
+                <a:latin typeface="Helvetica Neue"/>
+              </a:rPr>
+              <a:t>For the DR, we use a Bi-GRU with 1,024 hidden units and set the ...</a:t>
+            </a:r>
+          </a:p>
+          <a:p>
+            <a:pPr>
+              <a:lnSpc>
+                <a:spcPct val="125000"/>
+              </a:lnSpc>
+              <a:spcBef>
+                <a:spcPts val="1200"/>
+              </a:spcBef>
+            </a:pPr>
+            <a:r>
+              <a:rPr sz="2000" b="1">
+                <a:solidFill>
+                  <a:srgbClr val="C08A2E"/>
+                </a:solidFill>
+                <a:latin typeface="Helvetica Neue"/>
+              </a:rPr>
+              <a:t>-  </a:t>
+            </a:r>
+            <a:r>
+              <a:rPr sz="2000">
+                <a:solidFill>
+                  <a:srgbClr val="10233A"/>
+                </a:solidFill>
+                <a:latin typeface="Helvetica Neue"/>
+              </a:rPr>
+              <a:t>The PAR is designed as Seq2Seq with 512-unit GRU</a:t>
+            </a:r>
+          </a:p>
+          <a:p>
+            <a:pPr>
+              <a:lnSpc>
+                <a:spcPct val="125000"/>
+              </a:lnSpc>
+              <a:spcBef>
+                <a:spcPts val="1200"/>
+              </a:spcBef>
+            </a:pPr>
+            <a:r>
+              <a:rPr sz="2000" b="1">
+                <a:solidFill>
+                  <a:srgbClr val="C08A2E"/>
+                </a:solidFill>
+                <a:latin typeface="Helvetica Neue"/>
+              </a:rPr>
+              <a:t>-  </a:t>
+            </a:r>
+            <a:r>
+              <a:rPr sz="2000">
+                <a:solidFill>
+                  <a:srgbClr val="10233A"/>
+                </a:solidFill>
+                <a:latin typeface="Helvetica Neue"/>
+              </a:rPr>
+              <a:t>We train our network end-to-end using ADAM (Diederik P</a:t>
+            </a:r>
+          </a:p>
+          <a:p>
+            <a:pPr>
+              <a:lnSpc>
+                <a:spcPct val="125000"/>
+              </a:lnSpc>
+              <a:spcBef>
+                <a:spcPts val="1200"/>
+              </a:spcBef>
+            </a:pPr>
+            <a:r>
+              <a:rPr sz="2000" b="1">
+                <a:solidFill>
+                  <a:srgbClr val="C08A2E"/>
+                </a:solidFill>
+                <a:latin typeface="Helvetica Neue"/>
+              </a:rPr>
+              <a:t>-  </a:t>
+            </a:r>
+            <a:r>
+              <a:rPr sz="2000">
+                <a:solidFill>
+                  <a:srgbClr val="10233A"/>
+                </a:solidFill>
+                <a:latin typeface="Helvetica Neue"/>
+              </a:rPr>
+              <a:t>All the MLPs are two-layer fullyconnected networks</a:t>
+            </a:r>
+          </a:p>
+        </p:txBody>
+      </p:sp>
+      <p:sp>
+        <p:nvSpPr>
+          <p:cNvPr id="5" name="TextBox 4"/>
+          <p:cNvSpPr txBox="1"/>
+          <p:nvPr/>
+        </p:nvSpPr>
+        <p:spPr>
+          <a:xfrm>
+            <a:off x="10881360" y="6446520"/>
+            <a:ext cx="548640" cy="274320"/>
+          </a:xfrm>
+          <a:prstGeom prst="rect">
+            <a:avLst/>
+          </a:prstGeom>
+          <a:noFill/>
+        </p:spPr>
+        <p:txBody>
+          <a:bodyPr wrap="square" anchor="t" lIns="0" rIns="0" tIns="0" bIns="0">
+            <a:spAutoFit/>
+          </a:bodyPr>
+          <a:lstStyle/>
+          <a:p>
+            <a:pPr algn="r">
+              <a:lnSpc>
+                <a:spcPct val="120000"/>
+              </a:lnSpc>
+              <a:spcBef>
+                <a:spcPts val="0"/>
+              </a:spcBef>
+            </a:pPr>
+            <a:r>
+              <a:rPr sz="900" b="0">
+                <a:solidFill>
+                  <a:srgbClr val="5A6B7C"/>
+                </a:solidFill>
+                <a:latin typeface="Helvetica Neue"/>
+              </a:rPr>
+              <a:t>11</a:t>
+            </a:r>
+          </a:p>
+        </p:txBody>
+      </p:sp>
+    </p:spTree>
+  </p:cSld>
+  <p:clrMapOvr>
+    <a:masterClrMapping/>
+  </p:clrMapOvr>
+</p:sld>
+</file>
+
+<file path=ppt/slides/slide12.xml><?xml version="1.0" encoding="utf-8"?>
+<p:sld xmlns:a="http://schemas.openxmlformats.org/drawingml/2006/main" xmlns:p="http://schemas.openxmlformats.org/presentationml/2006/main" xmlns:r="http://schemas.openxmlformats.org/officeDocument/2006/relationships">
+  <p:cSld>
+    <p:spTree>
+      <p:nvGrpSpPr>
+        <p:cNvPr id="1" name=""/>
+        <p:cNvGrpSpPr/>
+        <p:nvPr/>
+      </p:nvGrpSpPr>
+      <p:grpSpPr/>
+      <p:sp>
+        <p:nvSpPr>
+          <p:cNvPr id="2" name="TextBox 1"/>
+          <p:cNvSpPr txBox="1"/>
+          <p:nvPr/>
+        </p:nvSpPr>
+        <p:spPr>
+          <a:xfrm>
+            <a:off x="822960" y="502920"/>
+            <a:ext cx="10515600" cy="822960"/>
+          </a:xfrm>
+          <a:prstGeom prst="rect">
+            <a:avLst/>
+          </a:prstGeom>
+          <a:noFill/>
+        </p:spPr>
+        <p:txBody>
+          <a:bodyPr wrap="square" anchor="t" lIns="0" rIns="0" tIns="0" bIns="0">
+            <a:spAutoFit/>
+          </a:bodyPr>
+          <a:lstStyle/>
+          <a:p>
+            <a:pPr algn="l">
+              <a:lnSpc>
+                <a:spcPct val="110000"/>
+              </a:lnSpc>
+              <a:spcBef>
+                <a:spcPts val="0"/>
+              </a:spcBef>
+            </a:pPr>
+            <a:r>
+              <a:rPr sz="2800" b="1">
+                <a:solidFill>
+                  <a:srgbClr val="10233A"/>
+                </a:solidFill>
+                <a:latin typeface="Helvetica Neue"/>
+              </a:rPr>
+              <a:t>Conclusion</a:t>
+            </a:r>
+          </a:p>
+        </p:txBody>
+      </p:sp>
+      <p:sp>
+        <p:nvSpPr>
+          <p:cNvPr id="3" name="Rectangle 2"/>
+          <p:cNvSpPr/>
+          <p:nvPr/>
+        </p:nvSpPr>
+        <p:spPr>
+          <a:xfrm>
+            <a:off x="822960" y="1298448"/>
+            <a:ext cx="10515600" cy="18288"/>
+          </a:xfrm>
+          <a:prstGeom prst="rect">
+            <a:avLst/>
+          </a:prstGeom>
+          <a:solidFill>
+            <a:srgbClr val="DDE2E8"/>
+          </a:solidFill>
+          <a:ln>
+            <a:noFill/>
+          </a:ln>
+        </p:spPr>
+        <p:style>
+          <a:lnRef idx="1">
+            <a:schemeClr val="accent1"/>
+          </a:lnRef>
+          <a:fillRef idx="3">
+            <a:schemeClr val="accent1"/>
+          </a:fillRef>
+          <a:effectRef idx="2">
+            <a:schemeClr val="accent1"/>
+          </a:effectRef>
+          <a:fontRef idx="minor">
+            <a:schemeClr val="lt1"/>
+          </a:fontRef>
+        </p:style>
+        <p:txBody>
+          <a:bodyPr rtlCol="0" anchor="ctr"/>
+          <a:lstStyle/>
+          <a:p>
+            <a:pPr algn="ctr"/>
+          </a:p>
+        </p:txBody>
+      </p:sp>
+      <p:sp>
+        <p:nvSpPr>
+          <p:cNvPr id="4" name="TextBox 3"/>
+          <p:cNvSpPr txBox="1"/>
+          <p:nvPr/>
+        </p:nvSpPr>
+        <p:spPr>
+          <a:xfrm>
+            <a:off x="868680" y="1600200"/>
+            <a:ext cx="10424160" cy="4114800"/>
+          </a:xfrm>
+          <a:prstGeom prst="rect">
+            <a:avLst/>
+          </a:prstGeom>
+          <a:noFill/>
+        </p:spPr>
+        <p:txBody>
+          <a:bodyPr wrap="square" anchor="t" lIns="0" rIns="0" tIns="0" bIns="0">
+            <a:spAutoFit/>
+          </a:bodyPr>
+          <a:lstStyle/>
+          <a:p>
+            <a:pPr>
+              <a:lnSpc>
+                <a:spcPct val="125000"/>
+              </a:lnSpc>
+              <a:spcBef>
+                <a:spcPts val="0"/>
+              </a:spcBef>
+            </a:pPr>
+            <a:r>
+              <a:rPr sz="2000" b="1">
+                <a:solidFill>
+                  <a:srgbClr val="C08A2E"/>
+                </a:solidFill>
+                <a:latin typeface="Helvetica Neue"/>
+              </a:rPr>
+              <a:t>-  </a:t>
+            </a:r>
+            <a:r>
+              <a:rPr sz="2000">
+                <a:solidFill>
+                  <a:srgbClr val="10233A"/>
+                </a:solidFill>
+                <a:latin typeface="Helvetica Neue"/>
+              </a:rPr>
+              <a:t>We release a large set of 5,873 paired documents and slide decks, and provide ...</a:t>
+            </a:r>
+          </a:p>
+          <a:p>
+            <a:pPr>
+              <a:lnSpc>
+                <a:spcPct val="125000"/>
+              </a:lnSpc>
+              <a:spcBef>
+                <a:spcPts val="1200"/>
+              </a:spcBef>
+            </a:pPr>
+            <a:r>
+              <a:rPr sz="2000" b="1">
+                <a:solidFill>
+                  <a:srgbClr val="C08A2E"/>
+                </a:solidFill>
+                <a:latin typeface="Helvetica Neue"/>
+              </a:rPr>
+              <a:t>-  </a:t>
+            </a:r>
+            <a:r>
+              <a:rPr sz="2000">
+                <a:solidFill>
+                  <a:srgbClr val="10233A"/>
+                </a:solidFill>
+                <a:latin typeface="Helvetica Neue"/>
+              </a:rPr>
+              <a:t>We present a novel task and approach for generating slides from documents</a:t>
+            </a:r>
+          </a:p>
+          <a:p>
+            <a:pPr>
+              <a:lnSpc>
+                <a:spcPct val="125000"/>
+              </a:lnSpc>
+              <a:spcBef>
+                <a:spcPts val="1200"/>
+              </a:spcBef>
+            </a:pPr>
+            <a:r>
+              <a:rPr sz="2000" b="1">
+                <a:solidFill>
+                  <a:srgbClr val="C08A2E"/>
+                </a:solidFill>
+                <a:latin typeface="Helvetica Neue"/>
+              </a:rPr>
+              <a:t>-  </a:t>
+            </a:r>
+            <a:r>
+              <a:rPr sz="2000">
+                <a:solidFill>
+                  <a:srgbClr val="10233A"/>
+                </a:solidFill>
+                <a:latin typeface="Helvetica Neue"/>
+              </a:rPr>
+              <a:t>We hope our work will help advance the state-of-the-art in vision-and-language understanding</a:t>
+            </a:r>
+          </a:p>
+          <a:p>
+            <a:pPr>
+              <a:lnSpc>
+                <a:spcPct val="125000"/>
+              </a:lnSpc>
+              <a:spcBef>
+                <a:spcPts val="1200"/>
+              </a:spcBef>
+            </a:pPr>
+            <a:r>
+              <a:rPr sz="2000" b="1">
+                <a:solidFill>
+                  <a:srgbClr val="C08A2E"/>
+                </a:solidFill>
+                <a:latin typeface="Helvetica Neue"/>
+              </a:rPr>
+              <a:t>-  </a:t>
+            </a:r>
+            <a:r>
+              <a:rPr sz="2000">
+                <a:solidFill>
+                  <a:srgbClr val="10233A"/>
+                </a:solidFill>
+                <a:latin typeface="Helvetica Neue"/>
+              </a:rPr>
+              <a:t>This is a challenging multimodal task that involves understanding and summarizing documents containing text ...</a:t>
+            </a:r>
+          </a:p>
+        </p:txBody>
+      </p:sp>
+      <p:sp>
+        <p:nvSpPr>
+          <p:cNvPr id="5" name="TextBox 4"/>
+          <p:cNvSpPr txBox="1"/>
+          <p:nvPr/>
+        </p:nvSpPr>
+        <p:spPr>
+          <a:xfrm>
+            <a:off x="10881360" y="6446520"/>
+            <a:ext cx="548640" cy="274320"/>
+          </a:xfrm>
+          <a:prstGeom prst="rect">
+            <a:avLst/>
+          </a:prstGeom>
+          <a:noFill/>
+        </p:spPr>
+        <p:txBody>
+          <a:bodyPr wrap="square" anchor="t" lIns="0" rIns="0" tIns="0" bIns="0">
+            <a:spAutoFit/>
+          </a:bodyPr>
+          <a:lstStyle/>
+          <a:p>
+            <a:pPr algn="r">
+              <a:lnSpc>
+                <a:spcPct val="120000"/>
+              </a:lnSpc>
+              <a:spcBef>
+                <a:spcPts val="0"/>
+              </a:spcBef>
+            </a:pPr>
+            <a:r>
+              <a:rPr sz="900" b="0">
+                <a:solidFill>
+                  <a:srgbClr val="5A6B7C"/>
+                </a:solidFill>
+                <a:latin typeface="Helvetica Neue"/>
+              </a:rPr>
+              <a:t>12</a:t>
+            </a:r>
+          </a:p>
+        </p:txBody>
+      </p:sp>
+    </p:spTree>
+  </p:cSld>
+  <p:clrMapOvr>
+    <a:masterClrMapping/>
+  </p:clrMapOvr>
+</p:sld>
+</file>
+
+<file path=ppt/slides/slide2.xml><?xml version="1.0" encoding="utf-8"?>
+<p:sld xmlns:a="http://schemas.openxmlformats.org/drawingml/2006/main" xmlns:p="http://schemas.openxmlformats.org/presentationml/2006/main" xmlns:r="http://schemas.openxmlformats.org/officeDocument/2006/relationships">
+  <p:cSld>
+    <p:spTree>
+      <p:nvGrpSpPr>
+        <p:cNvPr id="1" name=""/>
+        <p:cNvGrpSpPr/>
+        <p:nvPr/>
+      </p:nvGrpSpPr>
+      <p:grpSpPr/>
+      <p:sp>
+        <p:nvSpPr>
+          <p:cNvPr id="2" name="TextBox 1"/>
+          <p:cNvSpPr txBox="1"/>
+          <p:nvPr/>
+        </p:nvSpPr>
+        <p:spPr>
+          <a:xfrm>
+            <a:off x="822960" y="502920"/>
+            <a:ext cx="10515600" cy="822960"/>
+          </a:xfrm>
+          <a:prstGeom prst="rect">
+            <a:avLst/>
+          </a:prstGeom>
+          <a:noFill/>
+        </p:spPr>
+        <p:txBody>
+          <a:bodyPr wrap="square" anchor="t" lIns="0" rIns="0" tIns="0" bIns="0">
+            <a:spAutoFit/>
+          </a:bodyPr>
+          <a:lstStyle/>
+          <a:p>
+            <a:pPr algn="l">
+              <a:lnSpc>
+                <a:spcPct val="110000"/>
+              </a:lnSpc>
+              <a:spcBef>
+                <a:spcPts val="0"/>
+              </a:spcBef>
+            </a:pPr>
+            <a:r>
+              <a:rPr sz="2800" b="1">
+                <a:solidFill>
+                  <a:srgbClr val="10233A"/>
+                </a:solidFill>
+                <a:latin typeface="Helvetica Neue"/>
+              </a:rPr>
+              <a:t>Abstract</a:t>
+            </a:r>
+          </a:p>
+        </p:txBody>
+      </p:sp>
+      <p:sp>
+        <p:nvSpPr>
+          <p:cNvPr id="3" name="Rectangle 2"/>
+          <p:cNvSpPr/>
+          <p:nvPr/>
+        </p:nvSpPr>
+        <p:spPr>
+          <a:xfrm>
+            <a:off x="822960" y="1298448"/>
+            <a:ext cx="10515600" cy="18288"/>
+          </a:xfrm>
+          <a:prstGeom prst="rect">
+            <a:avLst/>
+          </a:prstGeom>
+          <a:solidFill>
+            <a:srgbClr val="DDE2E8"/>
+          </a:solidFill>
+          <a:ln>
+            <a:noFill/>
+          </a:ln>
+        </p:spPr>
+        <p:style>
+          <a:lnRef idx="1">
+            <a:schemeClr val="accent1"/>
+          </a:lnRef>
+          <a:fillRef idx="3">
+            <a:schemeClr val="accent1"/>
+          </a:fillRef>
+          <a:effectRef idx="2">
+            <a:schemeClr val="accent1"/>
+          </a:effectRef>
+          <a:fontRef idx="minor">
+            <a:schemeClr val="lt1"/>
+          </a:fontRef>
+        </p:style>
+        <p:txBody>
+          <a:bodyPr rtlCol="0" anchor="ctr"/>
+          <a:lstStyle/>
+          <a:p>
+            <a:pPr algn="ctr"/>
+          </a:p>
+        </p:txBody>
+      </p:sp>
+      <p:sp>
+        <p:nvSpPr>
+          <p:cNvPr id="4" name="TextBox 3"/>
+          <p:cNvSpPr txBox="1"/>
+          <p:nvPr/>
+        </p:nvSpPr>
+        <p:spPr>
+          <a:xfrm>
+            <a:off x="868680" y="1600200"/>
             <a:ext cx="4754880" cy="3840480"/>
           </a:xfrm>
           <a:prstGeom prst="rect">
@@ -4556,8 +5693,8 @@
         </p:blipFill>
         <p:spPr>
           <a:xfrm>
-            <a:off x="6868493" y="1481328"/>
-            <a:ext cx="3545173" cy="3931920"/>
+            <a:off x="6871394" y="1481328"/>
+            <a:ext cx="3539371" cy="3931920"/>
           </a:xfrm>
           <a:prstGeom prst="rect">
             <a:avLst/>
@@ -4896,7 +6033,7 @@
                 </a:solidFill>
                 <a:latin typeface="Helvetica Neue"/>
               </a:rPr>
-              <a:t>This requires solving several challenges in the vision-and-language domain, e.g., visual-semantic embedding and multimodal ...</a:t>
+              <a:t>Lastly, we explore both template-based and learning-based layout design and compare them both quantitatively ...</a:t>
             </a:r>
           </a:p>
           <a:p>
@@ -4924,7 +6061,7 @@
                 </a:solidFill>
                 <a:latin typeface="Helvetica Neue"/>
               </a:rPr>
-              <a:t>Lastly, we explore both template-based and learning-based layout design and compare them both quantitatively ...</a:t>
+              <a:t>It requires skills to abstract complex concepts and conveys them in a concise and ...</a:t>
             </a:r>
           </a:p>
           <a:p>
@@ -4952,7 +6089,7 @@
                 </a:solidFill>
                 <a:latin typeface="Helvetica Neue"/>
               </a:rPr>
-              <a:t>It requires skills to abstract complex concepts and conveys them in a concise and ...</a:t>
+              <a:t>Furthermore, none of the above addresses the challenge of finding an optimal visual layout ...</a:t>
             </a:r>
           </a:p>
           <a:p>
@@ -4980,7 +6117,7 @@
                 </a:solidFill>
                 <a:latin typeface="Helvetica Neue"/>
               </a:rPr>
-              <a:t>Furthermore, none of the above addresses the challenge of ﬁnding an optimal visual layout ...</a:t>
+              <a:t>These aspects make ours a unique task in the vision-and-language literature</a:t>
             </a:r>
           </a:p>
         </p:txBody>
@@ -5176,7 +6313,7 @@
                 </a:solidFill>
                 <a:latin typeface="Helvetica Neue"/>
               </a:rPr>
-              <a:t>We propose a large dataset of 5,873 pairs of high-quality scientiﬁc documents and slide ...</a:t>
+              <a:t>We propose a large dataset of 5,873 pairs of high-quality scientific documents and slide ...</a:t>
             </a:r>
           </a:p>
           <a:p>
@@ -5316,7 +6453,7 @@
                 </a:solidFill>
                 <a:latin typeface="Helvetica Neue"/>
               </a:rPr>
-              <a:t>Our task involves generating slides with relevant text and ﬁgures</a:t>
+              <a:t>Our task involves generating slides with relevant text and figures</a:t>
             </a:r>
           </a:p>
         </p:txBody>
@@ -5337,8 +6474,8 @@
         </p:blipFill>
         <p:spPr>
           <a:xfrm>
-            <a:off x="6659058" y="1481328"/>
-            <a:ext cx="3964043" cy="3931919"/>
+            <a:off x="6655846" y="1481328"/>
+            <a:ext cx="3970468" cy="3931919"/>
           </a:xfrm>
           <a:prstGeom prst="rect">
             <a:avLst/>
@@ -5621,7 +6758,7 @@
                 </a:solidFill>
                 <a:latin typeface="Helvetica Neue"/>
               </a:rPr>
-              <a:t>Table 1 reports the descriptive statistics of our dataset</a:t>
+              <a:t>The goal of DOC2PPT is to generate a slide deck from a multimodal document ...</a:t>
             </a:r>
           </a:p>
           <a:p>
@@ -5649,7 +6786,7 @@
                 </a:solidFill>
                 <a:latin typeface="Helvetica Neue"/>
               </a:rPr>
-              <a:t>We tune the two hyper-parameters θR and θA via cross-validation (we set θR = ...</a:t>
+              <a:t>This is a natural choice to encode our prior knowledge about the hierarchical structure</a:t>
             </a:r>
           </a:p>
           <a:p>
@@ -5677,7 +6814,7 @@
                 </a:solidFill>
                 <a:latin typeface="Helvetica Neue"/>
               </a:rPr>
-              <a:t>For simplicity, we discard F out if its highest visual embedding similarity is lower ...</a:t>
+              <a:t>We do not assign figures to any particular section because multiple sections can reference ...</a:t>
             </a:r>
           </a:p>
           <a:p>
@@ -5705,7 +6842,7 @@
                 </a:solidFill>
                 <a:latin typeface="Helvetica Neue"/>
               </a:rPr>
-              <a:t>The goal of DOC2PPT is to generate a slide deck from a multimodal document ...</a:t>
+              <a:t>This step is crucial because without it the text would be too verbose for ...</a:t>
             </a:r>
           </a:p>
           <a:p>
@@ -5733,7 +6870,7 @@
                 </a:solidFill>
                 <a:latin typeface="Helvetica Neue"/>
               </a:rPr>
-              <a:t>Figure 2: An overview of our architecture</a:t>
+              <a:t>Given the multi-objective nature of the task, we design our network with modularized components ...</a:t>
             </a:r>
           </a:p>
           <a:p>
@@ -5761,7 +6898,7 @@
                 </a:solidFill>
                 <a:latin typeface="Helvetica Neue"/>
               </a:rPr>
-              <a:t>This is a natural choice to encode our prior knowledge about the hierarchical structure</a:t>
+              <a:t>We paraphrase sentences before placing them on slides</a:t>
             </a:r>
           </a:p>
         </p:txBody>
@@ -5863,7 +7000,7 @@
                 </a:solidFill>
                 <a:latin typeface="Helvetica Neue"/>
               </a:rPr>
-              <a:t>Experiments</a:t>
+              <a:t>Training</a:t>
             </a:r>
           </a:p>
         </p:txBody>
@@ -5942,7 +7079,7 @@
               </a:spcBef>
             </a:pPr>
             <a:r>
-              <a:rPr sz="2000" b="1">
+              <a:rPr sz="1700" b="1">
                 <a:solidFill>
                   <a:srgbClr val="C08A2E"/>
                 </a:solidFill>
@@ -5951,13 +7088,13 @@
               <a:t>-  </a:t>
             </a:r>
             <a:r>
-              <a:rPr sz="2000">
+              <a:rPr sz="1700">
                 <a:solidFill>
                   <a:srgbClr val="10233A"/>
                 </a:solidFill>
                 <a:latin typeface="Helvetica Neue"/>
               </a:rPr>
-              <a:t>DOC2PPT is a new task with no established evaluation metrics and baselines</a:t>
+              <a:t>While there exist several solutions to bounding box regression (He et al</a:t>
             </a:r>
           </a:p>
           <a:p>
@@ -5970,7 +7107,7 @@
               </a:spcBef>
             </a:pPr>
             <a:r>
-              <a:rPr sz="2000" b="1">
+              <a:rPr sz="1700" b="1">
                 <a:solidFill>
                   <a:srgbClr val="C08A2E"/>
                 </a:solidFill>
@@ -5979,13 +7116,13 @@
               <a:t>-  </a:t>
             </a:r>
             <a:r>
-              <a:rPr sz="2000">
+              <a:rPr sz="1700">
                 <a:solidFill>
                   <a:srgbClr val="10233A"/>
                 </a:solidFill>
                 <a:latin typeface="Helvetica Neue"/>
               </a:rPr>
-              <a:t>We carefully ablate various components of our approach and evaluate them on our proposed ...</a:t>
+              <a:t>This term is slide-insensitive, i.e., the correct/incorrect inclusion is not affected by which specific ...</a:t>
             </a:r>
           </a:p>
           <a:p>
@@ -5998,7 +7135,7 @@
               </a:spcBef>
             </a:pPr>
             <a:r>
-              <a:rPr sz="2000" b="1">
+              <a:rPr sz="1700" b="1">
                 <a:solidFill>
                   <a:srgbClr val="C08A2E"/>
                 </a:solidFill>
@@ -6007,13 +7144,13 @@
               <a:t>-  </a:t>
             </a:r>
             <a:r>
-              <a:rPr sz="2000">
+              <a:rPr sz="1700">
                 <a:solidFill>
                   <a:srgbClr val="10233A"/>
                 </a:solidFill>
                 <a:latin typeface="Helvetica Neue"/>
               </a:rPr>
-              <a:t>We propose automatic metrics speciﬁ- cally designed for evaluating slide generation methods</a:t>
+              <a:t>Text-Figure matching loss (δ([Etxt u , Efig v ]))</a:t>
             </a:r>
           </a:p>
           <a:p>
@@ -6026,7 +7163,7 @@
               </a:spcBef>
             </a:pPr>
             <a:r>
-              <a:rPr sz="2000" b="1">
+              <a:rPr sz="1700" b="1">
                 <a:solidFill>
                   <a:srgbClr val="C08A2E"/>
                 </a:solidFill>
@@ -6035,13 +7172,69 @@
               <a:t>-  </a:t>
             </a:r>
             <a:r>
-              <a:rPr sz="2000">
+              <a:rPr sz="1700">
                 <a:solidFill>
                   <a:srgbClr val="10233A"/>
                 </a:solidFill>
                 <a:latin typeface="Helvetica Neue"/>
               </a:rPr>
-              <a:t>We also perform human evaluation to assess the generation quality</a:t>
+              <a:t>We follow the literature on visual-semantic embedding and learn an additional multimodal projection head ...</a:t>
+            </a:r>
+          </a:p>
+          <a:p>
+            <a:pPr>
+              <a:lnSpc>
+                <a:spcPct val="125000"/>
+              </a:lnSpc>
+              <a:spcBef>
+                <a:spcPts val="1200"/>
+              </a:spcBef>
+            </a:pPr>
+            <a:r>
+              <a:rPr sz="1700" b="1">
+                <a:solidFill>
+                  <a:srgbClr val="C08A2E"/>
+                </a:solidFill>
+                <a:latin typeface="Helvetica Neue"/>
+              </a:rPr>
+              <a:t>-  </a:t>
+            </a:r>
+            <a:r>
+              <a:rPr sz="1700">
+                <a:solidFill>
+                  <a:srgbClr val="10233A"/>
+                </a:solidFill>
+                <a:latin typeface="Helvetica Neue"/>
+              </a:rPr>
+              <a:t>The series of actions asec j and aslide k determines the structure of output ...</a:t>
+            </a:r>
+          </a:p>
+          <a:p>
+            <a:pPr>
+              <a:lnSpc>
+                <a:spcPct val="125000"/>
+              </a:lnSpc>
+              <a:spcBef>
+                <a:spcPts val="1200"/>
+              </a:spcBef>
+            </a:pPr>
+            <a:r>
+              <a:rPr sz="1700" b="1">
+                <a:solidFill>
+                  <a:srgbClr val="C08A2E"/>
+                </a:solidFill>
+                <a:latin typeface="Helvetica Neue"/>
+              </a:rPr>
+              <a:t>-  </a:t>
+            </a:r>
+            <a:r>
+              <a:rPr sz="1700">
+                <a:solidFill>
+                  <a:srgbClr val="10233A"/>
+                </a:solidFill>
+                <a:latin typeface="Helvetica Neue"/>
+              </a:rPr>
+              <a:t>The third term measures the relevance of text and figures appearing in the same ...</a:t>
             </a:r>
           </a:p>
         </p:txBody>
@@ -6143,7 +7336,7 @@
                 </a:solidFill>
                 <a:latin typeface="Helvetica Neue"/>
               </a:rPr>
-              <a:t>Evaluation Metrics</a:t>
+              <a:t>Inference</a:t>
             </a:r>
           </a:p>
         </p:txBody>
@@ -6222,7 +7415,7 @@
               </a:spcBef>
             </a:pPr>
             <a:r>
-              <a:rPr sz="1800" b="1">
+              <a:rPr sz="2000" b="1">
                 <a:solidFill>
                   <a:srgbClr val="C08A2E"/>
                 </a:solidFill>
@@ -6231,13 +7424,13 @@
               <a:t>-  </a:t>
             </a:r>
             <a:r>
-              <a:rPr sz="1800">
+              <a:rPr sz="2000">
                 <a:solidFill>
                   <a:srgbClr val="10233A"/>
                 </a:solidFill>
                 <a:latin typeface="Helvetica Neue"/>
               </a:rPr>
-              <a:t>Each layer of the PT is based on a 256-unit GRU</a:t>
+              <a:t>We tune the two hyper-parameters θR and θA via cross-validation (we set θR = ...</a:t>
             </a:r>
           </a:p>
           <a:p>
@@ -6250,7 +7443,7 @@
               </a:spcBef>
             </a:pPr>
             <a:r>
-              <a:rPr sz="1800" b="1">
+              <a:rPr sz="2000" b="1">
                 <a:solidFill>
                   <a:srgbClr val="C08A2E"/>
                 </a:solidFill>
@@ -6259,13 +7452,13 @@
               <a:t>-  </a:t>
             </a:r>
             <a:r>
-              <a:rPr sz="1800">
+              <a:rPr sz="2000">
                 <a:solidFill>
                   <a:srgbClr val="10233A"/>
                 </a:solidFill>
                 <a:latin typeface="Helvetica Neue"/>
               </a:rPr>
-              <a:t>Implementation Detail For the DR, we use a Bi-GRU with 1,024 hidden units and ...</a:t>
+              <a:t>The inference procedures during training and test times largely follow the same process, with ...</a:t>
             </a:r>
           </a:p>
           <a:p>
@@ -6278,7 +7471,7 @@
               </a:spcBef>
             </a:pPr>
             <a:r>
-              <a:rPr sz="1800" b="1">
+              <a:rPr sz="2000" b="1">
                 <a:solidFill>
                   <a:srgbClr val="C08A2E"/>
                 </a:solidFill>
@@ -6287,13 +7480,13 @@
               <a:t>-  </a:t>
             </a:r>
             <a:r>
-              <a:rPr sz="1800">
+              <a:rPr sz="2000">
                 <a:solidFill>
                   <a:srgbClr val="10233A"/>
                 </a:solidFill>
                 <a:latin typeface="Helvetica Neue"/>
               </a:rPr>
-              <a:t>The PAR is designed as Seq2Seq with 512-unit GRU</a:t>
+              <a:t>That is, once our model generates a slide deck, we remove figures that have ...</a:t>
             </a:r>
           </a:p>
           <a:p>
@@ -6306,7 +7499,7 @@
               </a:spcBef>
             </a:pPr>
             <a:r>
-              <a:rPr sz="1800" b="1">
+              <a:rPr sz="2000" b="1">
                 <a:solidFill>
                   <a:srgbClr val="C08A2E"/>
                 </a:solidFill>
@@ -6315,69 +7508,13 @@
               <a:t>-  </a:t>
             </a:r>
             <a:r>
-              <a:rPr sz="1800">
+              <a:rPr sz="2000">
                 <a:solidFill>
                   <a:srgbClr val="10233A"/>
                 </a:solidFill>
                 <a:latin typeface="Helvetica Neue"/>
               </a:rPr>
-              <a:t>Therefore, we propose the slide-level ROUGE: ROUGE-SL = ROUGE-L × e |Q− ˜ Q| ...</a:t>
-            </a:r>
-          </a:p>
-          <a:p>
-            <a:pPr>
-              <a:lnSpc>
-                <a:spcPct val="125000"/>
-              </a:lnSpc>
-              <a:spcBef>
-                <a:spcPts val="1200"/>
-              </a:spcBef>
-            </a:pPr>
-            <a:r>
-              <a:rPr sz="1800" b="1">
-                <a:solidFill>
-                  <a:srgbClr val="C08A2E"/>
-                </a:solidFill>
-                <a:latin typeface="Helvetica Neue"/>
-              </a:rPr>
-              <a:t>-  </a:t>
-            </a:r>
-            <a:r>
-              <a:rPr sz="1800">
-                <a:solidFill>
-                  <a:srgbClr val="10233A"/>
-                </a:solidFill>
-                <a:latin typeface="Helvetica Neue"/>
-              </a:rPr>
-              <a:t>Intuitively, the number of slides in a deck is a good proxy for the ...</a:t>
-            </a:r>
-          </a:p>
-          <a:p>
-            <a:pPr>
-              <a:lnSpc>
-                <a:spcPct val="125000"/>
-              </a:lnSpc>
-              <a:spcBef>
-                <a:spcPts val="1200"/>
-              </a:spcBef>
-            </a:pPr>
-            <a:r>
-              <a:rPr sz="1800" b="1">
-                <a:solidFill>
-                  <a:srgbClr val="C08A2E"/>
-                </a:solidFill>
-                <a:latin typeface="Helvetica Neue"/>
-              </a:rPr>
-              <a:t>-  </a:t>
-            </a:r>
-            <a:r>
-              <a:rPr sz="1800">
-                <a:solidFill>
-                  <a:srgbClr val="10233A"/>
-                </a:solidFill>
-                <a:latin typeface="Helvetica Neue"/>
-              </a:rPr>
-              <a:t>Ablation Settings ROUGE-SL LC-FS TFR mIoU Hrch-PT PAR TIM Post Proc</a:t>
+              <a:t>The inference procedures during training and test times largely follow the same process, with ...</a:t>
             </a:r>
           </a:p>
         </p:txBody>
@@ -6479,7 +7616,7 @@
                 </a:solidFill>
                 <a:latin typeface="Helvetica Neue"/>
               </a:rPr>
-              <a:t>Results and Discussions</a:t>
+              <a:t>Dataset</a:t>
             </a:r>
           </a:p>
         </p:txBody>
@@ -6573,7 +7710,7 @@
                 </a:solidFill>
                 <a:latin typeface="Helvetica Neue"/>
               </a:rPr>
-              <a:t>Table 2 (a) and (b) compare the two models on the four metrics</a:t>
+              <a:t>For simplicity, we discard F out if its highest visual embedding similarity is lower ...</a:t>
             </a:r>
           </a:p>
           <a:p>
@@ -6601,7 +7738,7 @@
                 </a:solidFill>
                 <a:latin typeface="Helvetica Neue"/>
               </a:rPr>
-              <a:t>Table 2 (f) shows this post-processing further improves the two image-related metrics, LC-FS and ...</a:t>
+              <a:t>Lastly, we match figures from slides to those in the corresponding document</a:t>
             </a:r>
           </a:p>
           <a:p>
@@ -6629,7 +7766,7 @@
                 </a:solidFill>
                 <a:latin typeface="Helvetica Neue"/>
               </a:rPr>
-              <a:t>Significance tests: two-sample t-test (p &lt;0.05.) maining space under the main content</a:t>
+              <a:t>Note that some figures in slides do not appear in the corresponding document (and ...</a:t>
             </a:r>
           </a:p>
           <a:p>
@@ -6657,7 +7794,7 @@
                 </a:solidFill>
                 <a:latin typeface="Helvetica Neue"/>
               </a:rPr>
-              <a:t>How well do the ﬁgure(s)/tables(s) in DECK A match the text or ﬁgures/tables in ...</a:t>
+              <a:t>We limit the search space only within the corresponding sections using the slide-section matching ...</a:t>
             </a:r>
           </a:p>
           <a:p>
@@ -6685,7 +7822,7 @@
                 </a:solidFill>
                 <a:latin typeface="Helvetica Neue"/>
               </a:rPr>
-              <a:t>The responses were all on a scale of 1 (not similar at all) to ...</a:t>
+              <a:t>We match sentences from slides to the corresponding document</a:t>
             </a:r>
           </a:p>
           <a:p>
@@ -6713,7 +7850,7 @@
                 </a:solidFill>
                 <a:latin typeface="Helvetica Neue"/>
               </a:rPr>
-              <a:t>The workers were then asked to answer three questions: Q1</a:t>
+              <a:t>For each document D, we extract sections S and sentences T in using ScienceParse ...</a:t>
             </a:r>
           </a:p>
         </p:txBody>
@@ -6815,7 +7952,7 @@
                 </a:solidFill>
                 <a:latin typeface="Helvetica Neue"/>
               </a:rPr>
-              <a:t>Conclusion</a:t>
+              <a:t>Experiments</a:t>
             </a:r>
           </a:p>
         </p:txBody>
@@ -6894,7 +8031,7 @@
               </a:spcBef>
             </a:pPr>
             <a:r>
-              <a:rPr sz="1700" b="1">
+              <a:rPr sz="2000" b="1">
                 <a:solidFill>
                   <a:srgbClr val="C08A2E"/>
                 </a:solidFill>
@@ -6903,13 +8040,13 @@
               <a:t>-  </a:t>
             </a:r>
             <a:r>
-              <a:rPr sz="1700">
+              <a:rPr sz="2000">
                 <a:solidFill>
                   <a:srgbClr val="10233A"/>
                 </a:solidFill>
                 <a:latin typeface="Helvetica Neue"/>
               </a:rPr>
-              <a:t>Our slide stemming step is 93% accurate based on the human annotated validation set</a:t>
+              <a:t>DOC2PPT is a new task with no established evaluation metrics and baselines</a:t>
             </a:r>
           </a:p>
           <a:p>
@@ -6922,7 +8059,7 @@
               </a:spcBef>
             </a:pPr>
             <a:r>
-              <a:rPr sz="1700" b="1">
+              <a:rPr sz="2000" b="1">
                 <a:solidFill>
                   <a:srgbClr val="C08A2E"/>
                 </a:solidFill>
@@ -6931,13 +8068,13 @@
               <a:t>-  </a:t>
             </a:r>
             <a:r>
-              <a:rPr sz="1700">
+              <a:rPr sz="2000">
                 <a:solidFill>
                   <a:srgbClr val="10233A"/>
                 </a:solidFill>
                 <a:latin typeface="Helvetica Neue"/>
               </a:rPr>
-              <a:t>Sentence Matching Table 4 shows examples of matching sentences between the paper and the ...</a:t>
+              <a:t>We carefully ablate various components of our approach and evaluate them on our proposed ...</a:t>
             </a:r>
           </a:p>
           <a:p>
@@ -6950,7 +8087,7 @@
               </a:spcBef>
             </a:pPr>
             <a:r>
-              <a:rPr sz="1700" b="1">
+              <a:rPr sz="2000" b="1">
                 <a:solidFill>
                   <a:srgbClr val="C08A2E"/>
                 </a:solidFill>
@@ -6959,13 +8096,13 @@
               <a:t>-  </a:t>
             </a:r>
             <a:r>
-              <a:rPr sz="1700">
+              <a:rPr sz="2000">
                 <a:solidFill>
                   <a:srgbClr val="10233A"/>
                 </a:solidFill>
                 <a:latin typeface="Helvetica Neue"/>
               </a:rPr>
-              <a:t>Precision, recall, and F1 are evaluated using the human-labeled testing set</a:t>
+              <a:t>We propose automatic metrics specifically designed for evaluating slide generation methods</a:t>
             </a:r>
           </a:p>
           <a:p>
@@ -6978,7 +8115,7 @@
               </a:spcBef>
             </a:pPr>
             <a:r>
-              <a:rPr sz="1700" b="1">
+              <a:rPr sz="2000" b="1">
                 <a:solidFill>
                   <a:srgbClr val="C08A2E"/>
                 </a:solidFill>
@@ -6987,69 +8124,13 @@
               <a:t>-  </a:t>
             </a:r>
             <a:r>
-              <a:rPr sz="1700">
+              <a:rPr sz="2000">
                 <a:solidFill>
                   <a:srgbClr val="10233A"/>
                 </a:solidFill>
                 <a:latin typeface="Helvetica Neue"/>
               </a:rPr>
-              <a:t>Slides are matched with the section with the highest cosine similarity and our slide-section ...</a:t>
-            </a:r>
-          </a:p>
-          <a:p>
-            <a:pPr>
-              <a:lnSpc>
-                <a:spcPct val="125000"/>
-              </a:lnSpc>
-              <a:spcBef>
-                <a:spcPts val="1200"/>
-              </a:spcBef>
-            </a:pPr>
-            <a:r>
-              <a:rPr sz="1700" b="1">
-                <a:solidFill>
-                  <a:srgbClr val="C08A2E"/>
-                </a:solidFill>
-                <a:latin typeface="Helvetica Neue"/>
-              </a:rPr>
-              <a:t>-  </a:t>
-            </a:r>
-            <a:r>
-              <a:rPr sz="1700">
-                <a:solidFill>
-                  <a:srgbClr val="10233A"/>
-                </a:solidFill>
-                <a:latin typeface="Helvetica Neue"/>
-              </a:rPr>
-              <a:t>Also, using hobj beneﬁts more (w/ 32.27 vs w/o 31.95)</a:t>
-            </a:r>
-          </a:p>
-          <a:p>
-            <a:pPr>
-              <a:lnSpc>
-                <a:spcPct val="125000"/>
-              </a:lnSpc>
-              <a:spcBef>
-                <a:spcPts val="1200"/>
-              </a:spcBef>
-            </a:pPr>
-            <a:r>
-              <a:rPr sz="1700" b="1">
-                <a:solidFill>
-                  <a:srgbClr val="C08A2E"/>
-                </a:solidFill>
-                <a:latin typeface="Helvetica Neue"/>
-              </a:rPr>
-              <a:t>-  </a:t>
-            </a:r>
-            <a:r>
-              <a:rPr sz="1700">
-                <a:solidFill>
-                  <a:srgbClr val="10233A"/>
-                </a:solidFill>
-                <a:latin typeface="Helvetica Neue"/>
-              </a:rPr>
-              <a:t>Details of the Data Processing Steps Section 4 in our main paper explains how ...</a:t>
+              <a:t>We also perform human evaluation to assess the generation quality</a:t>
             </a:r>
           </a:p>
         </p:txBody>
